--- a/這世代要呼求你.pptx
+++ b/這世代要呼求你.pptx
@@ -115,6 +115,11 @@
       </a:defRPr>
     </a:lvl9pPr>
   </p:defaultTextStyle>
+  <p:extLst>
+    <p:ext uri="{EFAFB233-063F-42B5-8137-9DF3F51BA10A}">
+      <p15:sldGuideLst xmlns:p15="http://schemas.microsoft.com/office/powerpoint/2012/main"/>
+    </p:ext>
+  </p:extLst>
 </p:presentation>
 </file>
 
@@ -156,7 +161,7 @@
           <a:lstStyle/>
           <a:p>
             <a:r>
-              <a:rPr lang="en-US" altLang="zh-TW" smtClean="0"/>
+              <a:rPr lang="en-US" altLang="zh-TW"/>
               <a:t>Click to edit Master title style</a:t>
             </a:r>
             <a:endParaRPr lang="zh-TW" altLang="en-US"/>
@@ -275,7 +280,7 @@
           </a:lstStyle>
           <a:p>
             <a:r>
-              <a:rPr lang="en-US" altLang="zh-TW" smtClean="0"/>
+              <a:rPr lang="en-US" altLang="zh-TW"/>
               <a:t>Click to edit Master subtitle style</a:t>
             </a:r>
             <a:endParaRPr lang="zh-TW" altLang="en-US"/>
@@ -299,7 +304,7 @@
           <a:p>
             <a:fld id="{3020102E-9856-4336-8DBD-429C9C29F51B}" type="datetimeFigureOut">
               <a:rPr lang="en-US" smtClean="0"/>
-              <a:t>6/30/2023</a:t>
+              <a:t>5/25/2024</a:t>
             </a:fld>
             <a:endParaRPr lang="en-US"/>
           </a:p>
@@ -393,7 +398,7 @@
           <a:lstStyle/>
           <a:p>
             <a:r>
-              <a:rPr lang="en-US" altLang="zh-TW" smtClean="0"/>
+              <a:rPr lang="en-US" altLang="zh-TW"/>
               <a:t>Click to edit Master title style</a:t>
             </a:r>
             <a:endParaRPr lang="zh-TW" altLang="en-US"/>
@@ -417,35 +422,35 @@
           <a:p>
             <a:pPr lvl="0"/>
             <a:r>
-              <a:rPr lang="en-US" altLang="zh-TW" smtClean="0"/>
+              <a:rPr lang="en-US" altLang="zh-TW"/>
               <a:t>Edit Master text styles</a:t>
             </a:r>
           </a:p>
           <a:p>
             <a:pPr lvl="1"/>
             <a:r>
-              <a:rPr lang="en-US" altLang="zh-TW" smtClean="0"/>
+              <a:rPr lang="en-US" altLang="zh-TW"/>
               <a:t>Second level</a:t>
             </a:r>
           </a:p>
           <a:p>
             <a:pPr lvl="2"/>
             <a:r>
-              <a:rPr lang="en-US" altLang="zh-TW" smtClean="0"/>
+              <a:rPr lang="en-US" altLang="zh-TW"/>
               <a:t>Third level</a:t>
             </a:r>
           </a:p>
           <a:p>
             <a:pPr lvl="3"/>
             <a:r>
-              <a:rPr lang="en-US" altLang="zh-TW" smtClean="0"/>
+              <a:rPr lang="en-US" altLang="zh-TW"/>
               <a:t>Fourth level</a:t>
             </a:r>
           </a:p>
           <a:p>
             <a:pPr lvl="4"/>
             <a:r>
-              <a:rPr lang="en-US" altLang="zh-TW" smtClean="0"/>
+              <a:rPr lang="en-US" altLang="zh-TW"/>
               <a:t>Fifth level</a:t>
             </a:r>
             <a:endParaRPr lang="zh-TW" altLang="en-US"/>
@@ -469,7 +474,7 @@
           <a:p>
             <a:fld id="{3020102E-9856-4336-8DBD-429C9C29F51B}" type="datetimeFigureOut">
               <a:rPr lang="en-US" smtClean="0"/>
-              <a:t>6/30/2023</a:t>
+              <a:t>5/25/2024</a:t>
             </a:fld>
             <a:endParaRPr lang="en-US"/>
           </a:p>
@@ -568,7 +573,7 @@
           <a:lstStyle/>
           <a:p>
             <a:r>
-              <a:rPr lang="en-US" altLang="zh-TW" smtClean="0"/>
+              <a:rPr lang="en-US" altLang="zh-TW"/>
               <a:t>Click to edit Master title style</a:t>
             </a:r>
             <a:endParaRPr lang="zh-TW" altLang="en-US"/>
@@ -597,35 +602,35 @@
           <a:p>
             <a:pPr lvl="0"/>
             <a:r>
-              <a:rPr lang="en-US" altLang="zh-TW" smtClean="0"/>
+              <a:rPr lang="en-US" altLang="zh-TW"/>
               <a:t>Edit Master text styles</a:t>
             </a:r>
           </a:p>
           <a:p>
             <a:pPr lvl="1"/>
             <a:r>
-              <a:rPr lang="en-US" altLang="zh-TW" smtClean="0"/>
+              <a:rPr lang="en-US" altLang="zh-TW"/>
               <a:t>Second level</a:t>
             </a:r>
           </a:p>
           <a:p>
             <a:pPr lvl="2"/>
             <a:r>
-              <a:rPr lang="en-US" altLang="zh-TW" smtClean="0"/>
+              <a:rPr lang="en-US" altLang="zh-TW"/>
               <a:t>Third level</a:t>
             </a:r>
           </a:p>
           <a:p>
             <a:pPr lvl="3"/>
             <a:r>
-              <a:rPr lang="en-US" altLang="zh-TW" smtClean="0"/>
+              <a:rPr lang="en-US" altLang="zh-TW"/>
               <a:t>Fourth level</a:t>
             </a:r>
           </a:p>
           <a:p>
             <a:pPr lvl="4"/>
             <a:r>
-              <a:rPr lang="en-US" altLang="zh-TW" smtClean="0"/>
+              <a:rPr lang="en-US" altLang="zh-TW"/>
               <a:t>Fifth level</a:t>
             </a:r>
             <a:endParaRPr lang="zh-TW" altLang="en-US"/>
@@ -649,7 +654,7 @@
           <a:p>
             <a:fld id="{3020102E-9856-4336-8DBD-429C9C29F51B}" type="datetimeFigureOut">
               <a:rPr lang="en-US" smtClean="0"/>
-              <a:t>6/30/2023</a:t>
+              <a:t>5/25/2024</a:t>
             </a:fld>
             <a:endParaRPr lang="en-US"/>
           </a:p>
@@ -743,7 +748,7 @@
           <a:lstStyle/>
           <a:p>
             <a:r>
-              <a:rPr lang="en-US" altLang="zh-TW" smtClean="0"/>
+              <a:rPr lang="en-US" altLang="zh-TW"/>
               <a:t>Click to edit Master title style</a:t>
             </a:r>
             <a:endParaRPr lang="zh-TW" altLang="en-US"/>
@@ -767,35 +772,35 @@
           <a:p>
             <a:pPr lvl="0"/>
             <a:r>
-              <a:rPr lang="en-US" altLang="zh-TW" smtClean="0"/>
+              <a:rPr lang="en-US" altLang="zh-TW"/>
               <a:t>Edit Master text styles</a:t>
             </a:r>
           </a:p>
           <a:p>
             <a:pPr lvl="1"/>
             <a:r>
-              <a:rPr lang="en-US" altLang="zh-TW" smtClean="0"/>
+              <a:rPr lang="en-US" altLang="zh-TW"/>
               <a:t>Second level</a:t>
             </a:r>
           </a:p>
           <a:p>
             <a:pPr lvl="2"/>
             <a:r>
-              <a:rPr lang="en-US" altLang="zh-TW" smtClean="0"/>
+              <a:rPr lang="en-US" altLang="zh-TW"/>
               <a:t>Third level</a:t>
             </a:r>
           </a:p>
           <a:p>
             <a:pPr lvl="3"/>
             <a:r>
-              <a:rPr lang="en-US" altLang="zh-TW" smtClean="0"/>
+              <a:rPr lang="en-US" altLang="zh-TW"/>
               <a:t>Fourth level</a:t>
             </a:r>
           </a:p>
           <a:p>
             <a:pPr lvl="4"/>
             <a:r>
-              <a:rPr lang="en-US" altLang="zh-TW" smtClean="0"/>
+              <a:rPr lang="en-US" altLang="zh-TW"/>
               <a:t>Fifth level</a:t>
             </a:r>
             <a:endParaRPr lang="zh-TW" altLang="en-US"/>
@@ -819,7 +824,7 @@
           <a:p>
             <a:fld id="{3020102E-9856-4336-8DBD-429C9C29F51B}" type="datetimeFigureOut">
               <a:rPr lang="en-US" smtClean="0"/>
-              <a:t>6/30/2023</a:t>
+              <a:t>5/25/2024</a:t>
             </a:fld>
             <a:endParaRPr lang="en-US"/>
           </a:p>
@@ -922,7 +927,7 @@
           </a:lstStyle>
           <a:p>
             <a:r>
-              <a:rPr lang="en-US" altLang="zh-TW" smtClean="0"/>
+              <a:rPr lang="en-US" altLang="zh-TW"/>
               <a:t>Click to edit Master title style</a:t>
             </a:r>
             <a:endParaRPr lang="zh-TW" altLang="en-US"/>
@@ -1042,7 +1047,7 @@
           <a:p>
             <a:pPr lvl="0"/>
             <a:r>
-              <a:rPr lang="en-US" altLang="zh-TW" smtClean="0"/>
+              <a:rPr lang="en-US" altLang="zh-TW"/>
               <a:t>Edit Master text styles</a:t>
             </a:r>
           </a:p>
@@ -1065,7 +1070,7 @@
           <a:p>
             <a:fld id="{3020102E-9856-4336-8DBD-429C9C29F51B}" type="datetimeFigureOut">
               <a:rPr lang="en-US" smtClean="0"/>
-              <a:t>6/30/2023</a:t>
+              <a:t>5/25/2024</a:t>
             </a:fld>
             <a:endParaRPr lang="en-US"/>
           </a:p>
@@ -1159,7 +1164,7 @@
           <a:lstStyle/>
           <a:p>
             <a:r>
-              <a:rPr lang="en-US" altLang="zh-TW" smtClean="0"/>
+              <a:rPr lang="en-US" altLang="zh-TW"/>
               <a:t>Click to edit Master title style</a:t>
             </a:r>
             <a:endParaRPr lang="zh-TW" altLang="en-US"/>
@@ -1216,35 +1221,35 @@
           <a:p>
             <a:pPr lvl="0"/>
             <a:r>
-              <a:rPr lang="en-US" altLang="zh-TW" smtClean="0"/>
+              <a:rPr lang="en-US" altLang="zh-TW"/>
               <a:t>Edit Master text styles</a:t>
             </a:r>
           </a:p>
           <a:p>
             <a:pPr lvl="1"/>
             <a:r>
-              <a:rPr lang="en-US" altLang="zh-TW" smtClean="0"/>
+              <a:rPr lang="en-US" altLang="zh-TW"/>
               <a:t>Second level</a:t>
             </a:r>
           </a:p>
           <a:p>
             <a:pPr lvl="2"/>
             <a:r>
-              <a:rPr lang="en-US" altLang="zh-TW" smtClean="0"/>
+              <a:rPr lang="en-US" altLang="zh-TW"/>
               <a:t>Third level</a:t>
             </a:r>
           </a:p>
           <a:p>
             <a:pPr lvl="3"/>
             <a:r>
-              <a:rPr lang="en-US" altLang="zh-TW" smtClean="0"/>
+              <a:rPr lang="en-US" altLang="zh-TW"/>
               <a:t>Fourth level</a:t>
             </a:r>
           </a:p>
           <a:p>
             <a:pPr lvl="4"/>
             <a:r>
-              <a:rPr lang="en-US" altLang="zh-TW" smtClean="0"/>
+              <a:rPr lang="en-US" altLang="zh-TW"/>
               <a:t>Fifth level</a:t>
             </a:r>
             <a:endParaRPr lang="zh-TW" altLang="en-US"/>
@@ -1301,35 +1306,35 @@
           <a:p>
             <a:pPr lvl="0"/>
             <a:r>
-              <a:rPr lang="en-US" altLang="zh-TW" smtClean="0"/>
+              <a:rPr lang="en-US" altLang="zh-TW"/>
               <a:t>Edit Master text styles</a:t>
             </a:r>
           </a:p>
           <a:p>
             <a:pPr lvl="1"/>
             <a:r>
-              <a:rPr lang="en-US" altLang="zh-TW" smtClean="0"/>
+              <a:rPr lang="en-US" altLang="zh-TW"/>
               <a:t>Second level</a:t>
             </a:r>
           </a:p>
           <a:p>
             <a:pPr lvl="2"/>
             <a:r>
-              <a:rPr lang="en-US" altLang="zh-TW" smtClean="0"/>
+              <a:rPr lang="en-US" altLang="zh-TW"/>
               <a:t>Third level</a:t>
             </a:r>
           </a:p>
           <a:p>
             <a:pPr lvl="3"/>
             <a:r>
-              <a:rPr lang="en-US" altLang="zh-TW" smtClean="0"/>
+              <a:rPr lang="en-US" altLang="zh-TW"/>
               <a:t>Fourth level</a:t>
             </a:r>
           </a:p>
           <a:p>
             <a:pPr lvl="4"/>
             <a:r>
-              <a:rPr lang="en-US" altLang="zh-TW" smtClean="0"/>
+              <a:rPr lang="en-US" altLang="zh-TW"/>
               <a:t>Fifth level</a:t>
             </a:r>
             <a:endParaRPr lang="zh-TW" altLang="en-US"/>
@@ -1353,7 +1358,7 @@
           <a:p>
             <a:fld id="{3020102E-9856-4336-8DBD-429C9C29F51B}" type="datetimeFigureOut">
               <a:rPr lang="en-US" smtClean="0"/>
-              <a:t>6/30/2023</a:t>
+              <a:t>5/25/2024</a:t>
             </a:fld>
             <a:endParaRPr lang="en-US"/>
           </a:p>
@@ -1451,7 +1456,7 @@
           </a:lstStyle>
           <a:p>
             <a:r>
-              <a:rPr lang="en-US" altLang="zh-TW" smtClean="0"/>
+              <a:rPr lang="en-US" altLang="zh-TW"/>
               <a:t>Click to edit Master title style</a:t>
             </a:r>
             <a:endParaRPr lang="zh-TW" altLang="en-US"/>
@@ -1517,7 +1522,7 @@
           <a:p>
             <a:pPr lvl="0"/>
             <a:r>
-              <a:rPr lang="en-US" altLang="zh-TW" smtClean="0"/>
+              <a:rPr lang="en-US" altLang="zh-TW"/>
               <a:t>Edit Master text styles</a:t>
             </a:r>
           </a:p>
@@ -1573,35 +1578,35 @@
           <a:p>
             <a:pPr lvl="0"/>
             <a:r>
-              <a:rPr lang="en-US" altLang="zh-TW" smtClean="0"/>
+              <a:rPr lang="en-US" altLang="zh-TW"/>
               <a:t>Edit Master text styles</a:t>
             </a:r>
           </a:p>
           <a:p>
             <a:pPr lvl="1"/>
             <a:r>
-              <a:rPr lang="en-US" altLang="zh-TW" smtClean="0"/>
+              <a:rPr lang="en-US" altLang="zh-TW"/>
               <a:t>Second level</a:t>
             </a:r>
           </a:p>
           <a:p>
             <a:pPr lvl="2"/>
             <a:r>
-              <a:rPr lang="en-US" altLang="zh-TW" smtClean="0"/>
+              <a:rPr lang="en-US" altLang="zh-TW"/>
               <a:t>Third level</a:t>
             </a:r>
           </a:p>
           <a:p>
             <a:pPr lvl="3"/>
             <a:r>
-              <a:rPr lang="en-US" altLang="zh-TW" smtClean="0"/>
+              <a:rPr lang="en-US" altLang="zh-TW"/>
               <a:t>Fourth level</a:t>
             </a:r>
           </a:p>
           <a:p>
             <a:pPr lvl="4"/>
             <a:r>
-              <a:rPr lang="en-US" altLang="zh-TW" smtClean="0"/>
+              <a:rPr lang="en-US" altLang="zh-TW"/>
               <a:t>Fifth level</a:t>
             </a:r>
             <a:endParaRPr lang="zh-TW" altLang="en-US"/>
@@ -1667,7 +1672,7 @@
           <a:p>
             <a:pPr lvl="0"/>
             <a:r>
-              <a:rPr lang="en-US" altLang="zh-TW" smtClean="0"/>
+              <a:rPr lang="en-US" altLang="zh-TW"/>
               <a:t>Edit Master text styles</a:t>
             </a:r>
           </a:p>
@@ -1723,35 +1728,35 @@
           <a:p>
             <a:pPr lvl="0"/>
             <a:r>
-              <a:rPr lang="en-US" altLang="zh-TW" smtClean="0"/>
+              <a:rPr lang="en-US" altLang="zh-TW"/>
               <a:t>Edit Master text styles</a:t>
             </a:r>
           </a:p>
           <a:p>
             <a:pPr lvl="1"/>
             <a:r>
-              <a:rPr lang="en-US" altLang="zh-TW" smtClean="0"/>
+              <a:rPr lang="en-US" altLang="zh-TW"/>
               <a:t>Second level</a:t>
             </a:r>
           </a:p>
           <a:p>
             <a:pPr lvl="2"/>
             <a:r>
-              <a:rPr lang="en-US" altLang="zh-TW" smtClean="0"/>
+              <a:rPr lang="en-US" altLang="zh-TW"/>
               <a:t>Third level</a:t>
             </a:r>
           </a:p>
           <a:p>
             <a:pPr lvl="3"/>
             <a:r>
-              <a:rPr lang="en-US" altLang="zh-TW" smtClean="0"/>
+              <a:rPr lang="en-US" altLang="zh-TW"/>
               <a:t>Fourth level</a:t>
             </a:r>
           </a:p>
           <a:p>
             <a:pPr lvl="4"/>
             <a:r>
-              <a:rPr lang="en-US" altLang="zh-TW" smtClean="0"/>
+              <a:rPr lang="en-US" altLang="zh-TW"/>
               <a:t>Fifth level</a:t>
             </a:r>
             <a:endParaRPr lang="zh-TW" altLang="en-US"/>
@@ -1775,7 +1780,7 @@
           <a:p>
             <a:fld id="{3020102E-9856-4336-8DBD-429C9C29F51B}" type="datetimeFigureOut">
               <a:rPr lang="en-US" smtClean="0"/>
-              <a:t>6/30/2023</a:t>
+              <a:t>5/25/2024</a:t>
             </a:fld>
             <a:endParaRPr lang="en-US"/>
           </a:p>
@@ -1869,7 +1874,7 @@
           <a:lstStyle/>
           <a:p>
             <a:r>
-              <a:rPr lang="en-US" altLang="zh-TW" smtClean="0"/>
+              <a:rPr lang="en-US" altLang="zh-TW"/>
               <a:t>Click to edit Master title style</a:t>
             </a:r>
             <a:endParaRPr lang="zh-TW" altLang="en-US"/>
@@ -1893,7 +1898,7 @@
           <a:p>
             <a:fld id="{3020102E-9856-4336-8DBD-429C9C29F51B}" type="datetimeFigureOut">
               <a:rPr lang="en-US" smtClean="0"/>
-              <a:t>6/30/2023</a:t>
+              <a:t>5/25/2024</a:t>
             </a:fld>
             <a:endParaRPr lang="en-US"/>
           </a:p>
@@ -1988,7 +1993,7 @@
           <a:p>
             <a:fld id="{3020102E-9856-4336-8DBD-429C9C29F51B}" type="datetimeFigureOut">
               <a:rPr lang="en-US" smtClean="0"/>
-              <a:t>6/30/2023</a:t>
+              <a:t>5/25/2024</a:t>
             </a:fld>
             <a:endParaRPr lang="en-US"/>
           </a:p>
@@ -2091,7 +2096,7 @@
           </a:lstStyle>
           <a:p>
             <a:r>
-              <a:rPr lang="en-US" altLang="zh-TW" smtClean="0"/>
+              <a:rPr lang="en-US" altLang="zh-TW"/>
               <a:t>Click to edit Master title style</a:t>
             </a:r>
             <a:endParaRPr lang="zh-TW" altLang="en-US"/>
@@ -2148,35 +2153,35 @@
           <a:p>
             <a:pPr lvl="0"/>
             <a:r>
-              <a:rPr lang="en-US" altLang="zh-TW" smtClean="0"/>
+              <a:rPr lang="en-US" altLang="zh-TW"/>
               <a:t>Edit Master text styles</a:t>
             </a:r>
           </a:p>
           <a:p>
             <a:pPr lvl="1"/>
             <a:r>
-              <a:rPr lang="en-US" altLang="zh-TW" smtClean="0"/>
+              <a:rPr lang="en-US" altLang="zh-TW"/>
               <a:t>Second level</a:t>
             </a:r>
           </a:p>
           <a:p>
             <a:pPr lvl="2"/>
             <a:r>
-              <a:rPr lang="en-US" altLang="zh-TW" smtClean="0"/>
+              <a:rPr lang="en-US" altLang="zh-TW"/>
               <a:t>Third level</a:t>
             </a:r>
           </a:p>
           <a:p>
             <a:pPr lvl="3"/>
             <a:r>
-              <a:rPr lang="en-US" altLang="zh-TW" smtClean="0"/>
+              <a:rPr lang="en-US" altLang="zh-TW"/>
               <a:t>Fourth level</a:t>
             </a:r>
           </a:p>
           <a:p>
             <a:pPr lvl="4"/>
             <a:r>
-              <a:rPr lang="en-US" altLang="zh-TW" smtClean="0"/>
+              <a:rPr lang="en-US" altLang="zh-TW"/>
               <a:t>Fifth level</a:t>
             </a:r>
             <a:endParaRPr lang="zh-TW" altLang="en-US"/>
@@ -2242,7 +2247,7 @@
           <a:p>
             <a:pPr lvl="0"/>
             <a:r>
-              <a:rPr lang="en-US" altLang="zh-TW" smtClean="0"/>
+              <a:rPr lang="en-US" altLang="zh-TW"/>
               <a:t>Edit Master text styles</a:t>
             </a:r>
           </a:p>
@@ -2265,7 +2270,7 @@
           <a:p>
             <a:fld id="{3020102E-9856-4336-8DBD-429C9C29F51B}" type="datetimeFigureOut">
               <a:rPr lang="en-US" smtClean="0"/>
-              <a:t>6/30/2023</a:t>
+              <a:t>5/25/2024</a:t>
             </a:fld>
             <a:endParaRPr lang="en-US"/>
           </a:p>
@@ -2368,7 +2373,7 @@
           </a:lstStyle>
           <a:p>
             <a:r>
-              <a:rPr lang="en-US" altLang="zh-TW" smtClean="0"/>
+              <a:rPr lang="en-US" altLang="zh-TW"/>
               <a:t>Click to edit Master title style</a:t>
             </a:r>
             <a:endParaRPr lang="zh-TW" altLang="en-US"/>
@@ -2433,7 +2438,7 @@
           </a:lstStyle>
           <a:p>
             <a:r>
-              <a:rPr lang="en-US" altLang="zh-TW" smtClean="0"/>
+              <a:rPr lang="en-US" altLang="zh-TW"/>
               <a:t>Click icon to add picture</a:t>
             </a:r>
             <a:endParaRPr lang="zh-TW" altLang="en-US"/>
@@ -2499,7 +2504,7 @@
           <a:p>
             <a:pPr lvl="0"/>
             <a:r>
-              <a:rPr lang="en-US" altLang="zh-TW" smtClean="0"/>
+              <a:rPr lang="en-US" altLang="zh-TW"/>
               <a:t>Edit Master text styles</a:t>
             </a:r>
           </a:p>
@@ -2522,7 +2527,7 @@
           <a:p>
             <a:fld id="{3020102E-9856-4336-8DBD-429C9C29F51B}" type="datetimeFigureOut">
               <a:rPr lang="en-US" smtClean="0"/>
-              <a:t>6/30/2023</a:t>
+              <a:t>5/25/2024</a:t>
             </a:fld>
             <a:endParaRPr lang="en-US"/>
           </a:p>
@@ -2636,10 +2641,9 @@
           <a:lstStyle/>
           <a:p>
             <a:r>
-              <a:rPr lang="zh-TW" altLang="en-US" smtClean="0"/>
+              <a:rPr lang="zh-TW" altLang="en-US"/>
               <a:t>按一下以編輯母片標題樣式</a:t>
             </a:r>
-            <a:endParaRPr lang="zh-TW" altLang="en-US"/>
           </a:p>
         </p:txBody>
       </p:sp>
@@ -2670,38 +2674,37 @@
           <a:p>
             <a:pPr lvl="0"/>
             <a:r>
-              <a:rPr lang="zh-TW" altLang="en-US" smtClean="0"/>
+              <a:rPr lang="zh-TW" altLang="en-US"/>
               <a:t>按一下以編輯母片文字樣式</a:t>
             </a:r>
           </a:p>
           <a:p>
             <a:pPr lvl="1"/>
             <a:r>
-              <a:rPr lang="zh-TW" altLang="en-US" smtClean="0"/>
+              <a:rPr lang="zh-TW" altLang="en-US"/>
               <a:t>第二層</a:t>
             </a:r>
           </a:p>
           <a:p>
             <a:pPr lvl="2"/>
             <a:r>
-              <a:rPr lang="zh-TW" altLang="en-US" smtClean="0"/>
+              <a:rPr lang="zh-TW" altLang="en-US"/>
               <a:t>第三層</a:t>
             </a:r>
           </a:p>
           <a:p>
             <a:pPr lvl="3"/>
             <a:r>
-              <a:rPr lang="zh-TW" altLang="en-US" smtClean="0"/>
+              <a:rPr lang="zh-TW" altLang="en-US"/>
               <a:t>第四層</a:t>
             </a:r>
           </a:p>
           <a:p>
             <a:pPr lvl="4"/>
             <a:r>
-              <a:rPr lang="zh-TW" altLang="en-US" smtClean="0"/>
+              <a:rPr lang="zh-TW" altLang="en-US"/>
               <a:t>第五層</a:t>
             </a:r>
-            <a:endParaRPr lang="zh-TW" altLang="en-US"/>
           </a:p>
         </p:txBody>
       </p:sp>
@@ -2740,7 +2743,7 @@
           <a:p>
             <a:fld id="{3020102E-9856-4336-8DBD-429C9C29F51B}" type="datetimeFigureOut">
               <a:rPr lang="en-US" smtClean="0"/>
-              <a:t>6/30/2023</a:t>
+              <a:t>5/25/2024</a:t>
             </a:fld>
             <a:endParaRPr lang="en-US"/>
           </a:p>
@@ -3152,24 +3155,7 @@
                 <a:latin typeface="微軟正黑體" pitchFamily="34" charset="-120"/>
                 <a:ea typeface="微軟正黑體" pitchFamily="34" charset="-120"/>
               </a:rPr>
-              <a:t>這</a:t>
-            </a:r>
-            <a:r>
-              <a:rPr lang="zh-CN" altLang="en-US" sz="7200" b="1" i="1" dirty="0">
-                <a:solidFill>
-                  <a:srgbClr val="000066"/>
-                </a:solidFill>
-                <a:effectLst>
-                  <a:outerShdw blurRad="38100" dist="38100" dir="2700000" algn="tl">
-                    <a:srgbClr val="000000">
-                      <a:alpha val="43137"/>
-                    </a:srgbClr>
-                  </a:outerShdw>
-                </a:effectLst>
-                <a:latin typeface="微軟正黑體" pitchFamily="34" charset="-120"/>
-                <a:ea typeface="微軟正黑體" pitchFamily="34" charset="-120"/>
-              </a:rPr>
-              <a:t>世代要呼求祢</a:t>
+              <a:t>這世代要呼求祢</a:t>
             </a:r>
           </a:p>
         </p:txBody>
@@ -3322,7 +3308,7 @@
                 <a:latin typeface="Microsoft JhengHei" panose="020B0604030504040204" pitchFamily="34" charset="-120"/>
                 <a:ea typeface="Microsoft JhengHei" panose="020B0604030504040204" pitchFamily="34" charset="-120"/>
               </a:rPr>
-              <a:t>副</a:t>
+              <a:t>副歌</a:t>
             </a:r>
             <a:r>
               <a:rPr lang="en-US" sz="3733" b="1" dirty="0">
@@ -3764,27 +3750,7 @@
                 <a:latin typeface="微軟正黑體" pitchFamily="34" charset="-120"/>
                 <a:ea typeface="微軟正黑體" pitchFamily="34" charset="-120"/>
               </a:rPr>
-              <a:t>主  我</a:t>
-            </a:r>
-            <a:r>
-              <a:rPr lang="zh-TW" altLang="en-US" sz="6400" b="1" dirty="0">
-                <a:solidFill>
-                  <a:srgbClr val="000066"/>
-                </a:solidFill>
-                <a:latin typeface="微軟正黑體" pitchFamily="34" charset="-120"/>
-                <a:ea typeface="微軟正黑體" pitchFamily="34" charset="-120"/>
-              </a:rPr>
-              <a:t>屬</a:t>
-            </a:r>
-            <a:r>
-              <a:rPr lang="zh-TW" altLang="en-US" sz="6400" b="1" dirty="0">
-                <a:solidFill>
-                  <a:srgbClr val="000066"/>
-                </a:solidFill>
-                <a:latin typeface="微軟正黑體" pitchFamily="34" charset="-120"/>
-                <a:ea typeface="微軟正黑體" pitchFamily="34" charset="-120"/>
-              </a:rPr>
-              <a:t>於</a:t>
+              <a:t>主  我屬於</a:t>
             </a:r>
             <a:r>
               <a:rPr lang="zh-CN" altLang="en-US" sz="6400" b="1" dirty="0">
@@ -3889,7 +3855,7 @@
                 <a:latin typeface="Microsoft JhengHei" panose="020B0604030504040204" pitchFamily="34" charset="-120"/>
                 <a:ea typeface="Microsoft JhengHei" panose="020B0604030504040204" pitchFamily="34" charset="-120"/>
               </a:rPr>
-              <a:t>正</a:t>
+              <a:t>正歌</a:t>
             </a:r>
             <a:r>
               <a:rPr lang="en-US" sz="3733" b="1" dirty="0">
@@ -4078,7 +4044,7 @@
                 <a:latin typeface="Microsoft JhengHei" panose="020B0604030504040204" pitchFamily="34" charset="-120"/>
                 <a:ea typeface="Microsoft JhengHei" panose="020B0604030504040204" pitchFamily="34" charset="-120"/>
               </a:rPr>
-              <a:t>正</a:t>
+              <a:t>正歌</a:t>
             </a:r>
             <a:r>
               <a:rPr lang="en-US" sz="3733" b="1" dirty="0">
@@ -4247,7 +4213,7 @@
                 <a:latin typeface="Microsoft JhengHei" panose="020B0604030504040204" pitchFamily="34" charset="-120"/>
                 <a:ea typeface="Microsoft JhengHei" panose="020B0604030504040204" pitchFamily="34" charset="-120"/>
               </a:rPr>
-              <a:t>正</a:t>
+              <a:t>正歌</a:t>
             </a:r>
             <a:r>
               <a:rPr lang="en-US" sz="3733" b="1" dirty="0">
@@ -4436,7 +4402,7 @@
                 <a:latin typeface="Microsoft JhengHei" panose="020B0604030504040204" pitchFamily="34" charset="-120"/>
                 <a:ea typeface="Microsoft JhengHei" panose="020B0604030504040204" pitchFamily="34" charset="-120"/>
               </a:rPr>
-              <a:t>正</a:t>
+              <a:t>正歌</a:t>
             </a:r>
             <a:r>
               <a:rPr lang="en-US" sz="3733" b="1" dirty="0">
@@ -4595,7 +4561,7 @@
                 <a:latin typeface="Microsoft JhengHei" panose="020B0604030504040204" pitchFamily="34" charset="-120"/>
                 <a:ea typeface="Microsoft JhengHei" panose="020B0604030504040204" pitchFamily="34" charset="-120"/>
               </a:rPr>
-              <a:t>前副</a:t>
+              <a:t>前副歌</a:t>
             </a:r>
             <a:r>
               <a:rPr lang="en-US" sz="3733" b="1" dirty="0">
@@ -4784,7 +4750,7 @@
                 <a:latin typeface="Microsoft JhengHei" panose="020B0604030504040204" pitchFamily="34" charset="-120"/>
                 <a:ea typeface="Microsoft JhengHei" panose="020B0604030504040204" pitchFamily="34" charset="-120"/>
               </a:rPr>
-              <a:t>副</a:t>
+              <a:t>副歌</a:t>
             </a:r>
             <a:r>
               <a:rPr lang="en-US" sz="3733" b="1" dirty="0">
@@ -4963,7 +4929,7 @@
                 <a:latin typeface="Microsoft JhengHei" panose="020B0604030504040204" pitchFamily="34" charset="-120"/>
                 <a:ea typeface="Microsoft JhengHei" panose="020B0604030504040204" pitchFamily="34" charset="-120"/>
               </a:rPr>
-              <a:t>副</a:t>
+              <a:t>副歌</a:t>
             </a:r>
             <a:r>
               <a:rPr lang="en-US" sz="3733" b="1" dirty="0">
@@ -5152,7 +5118,7 @@
                 <a:latin typeface="Microsoft JhengHei" panose="020B0604030504040204" pitchFamily="34" charset="-120"/>
                 <a:ea typeface="Microsoft JhengHei" panose="020B0604030504040204" pitchFamily="34" charset="-120"/>
               </a:rPr>
-              <a:t>副</a:t>
+              <a:t>副歌</a:t>
             </a:r>
             <a:r>
               <a:rPr lang="en-US" sz="3733" b="1" dirty="0">
